--- a/assets/report.pptx
+++ b/assets/report.pptx
@@ -5,7 +5,7 @@
     <p:sldMasterId id="2147483648" r:id="rId1"/>
   </p:sldMasterIdLst>
   <p:notesMasterIdLst>
-    <p:notesMasterId r:id="rId10"/>
+    <p:notesMasterId r:id="rId12"/>
   </p:notesMasterIdLst>
   <p:sldIdLst>
     <p:sldId id="256" r:id="rId4"/>
@@ -14,6 +14,8 @@
     <p:sldId id="259" r:id="rId7"/>
     <p:sldId id="260" r:id="rId8"/>
     <p:sldId id="261" r:id="rId9"/>
+    <p:sldId id="262" r:id="rId10"/>
+    <p:sldId id="263" r:id="rId11"/>
   </p:sldIdLst>
   <p:sldSz cx="12192000" cy="6858000"/>
   <p:notesSz cx="6858000" cy="9144000"/>
@@ -139,7 +141,7 @@
       </p:grpSpPr>
       <p:sp>
         <p:nvSpPr>
-          <p:cNvPr id="557415788" name="Header Placeholder 1"/>
+          <p:cNvPr id="1505030054" name="Header Placeholder 1"/>
           <p:cNvSpPr>
             <a:spLocks noGrp="1"/>
           </p:cNvSpPr>
@@ -173,7 +175,7 @@
       </p:sp>
       <p:sp>
         <p:nvSpPr>
-          <p:cNvPr id="560746875" name="Date Placeholder 2"/>
+          <p:cNvPr id="58409358" name="Date Placeholder 2"/>
           <p:cNvSpPr>
             <a:spLocks noGrp="1"/>
           </p:cNvSpPr>
@@ -211,7 +213,7 @@
       </p:sp>
       <p:sp>
         <p:nvSpPr>
-          <p:cNvPr id="1374718663" name="Slide Image Placeholder 3"/>
+          <p:cNvPr id="1455549931" name="Slide Image Placeholder 3"/>
           <p:cNvSpPr>
             <a:spLocks noChangeAspect="1" noGrp="1" noRot="1"/>
           </p:cNvSpPr>
@@ -247,7 +249,7 @@
       </p:sp>
       <p:sp>
         <p:nvSpPr>
-          <p:cNvPr id="885823683" name="Notes Placeholder 4"/>
+          <p:cNvPr id="47585518" name="Notes Placeholder 4"/>
           <p:cNvSpPr>
             <a:spLocks noGrp="1"/>
           </p:cNvSpPr>
@@ -321,7 +323,7 @@
       </p:sp>
       <p:sp>
         <p:nvSpPr>
-          <p:cNvPr id="224900277" name="Footer Placeholder 5"/>
+          <p:cNvPr id="214383329" name="Footer Placeholder 5"/>
           <p:cNvSpPr>
             <a:spLocks noGrp="1"/>
           </p:cNvSpPr>
@@ -355,7 +357,7 @@
       </p:sp>
       <p:sp>
         <p:nvSpPr>
-          <p:cNvPr id="561178386" name="Slide Number Placeholder 6"/>
+          <p:cNvPr id="1937479340" name="Slide Number Placeholder 6"/>
           <p:cNvSpPr>
             <a:spLocks noGrp="1"/>
           </p:cNvSpPr>
@@ -508,7 +510,7 @@
       </p:grpSpPr>
       <p:sp>
         <p:nvSpPr>
-          <p:cNvPr id="418303948" name="Slide Image Placeholder 1"/>
+          <p:cNvPr id="1576239095" name="Slide Image Placeholder 1"/>
           <p:cNvSpPr>
             <a:spLocks noChangeAspect="1" noGrp="1" noRot="1"/>
           </p:cNvSpPr>
@@ -525,7 +527,7 @@
       </p:sp>
       <p:sp>
         <p:nvSpPr>
-          <p:cNvPr id="454300726" name="Notes Placeholder 2"/>
+          <p:cNvPr id="1008353942" name="Notes Placeholder 2"/>
           <p:cNvSpPr>
             <a:spLocks noGrp="1"/>
           </p:cNvSpPr>
@@ -550,7 +552,7 @@
       </p:sp>
       <p:sp>
         <p:nvSpPr>
-          <p:cNvPr id="1575923783" name="Slide Number Placeholder 3"/>
+          <p:cNvPr id="1237220625" name="Slide Number Placeholder 3"/>
           <p:cNvSpPr>
             <a:spLocks noGrp="1"/>
           </p:cNvSpPr>
@@ -601,7 +603,7 @@
       </p:grpSpPr>
       <p:sp>
         <p:nvSpPr>
-          <p:cNvPr id="2" name="Slide Image Placeholder 1"/>
+          <p:cNvPr id="1278729413" name="Slide Image Placeholder 1"/>
           <p:cNvSpPr>
             <a:spLocks noChangeAspect="1" noGrp="1" noRot="1"/>
           </p:cNvSpPr>
@@ -613,7 +615,7 @@
       </p:sp>
       <p:sp>
         <p:nvSpPr>
-          <p:cNvPr id="3" name="Notes Placeholder 2"/>
+          <p:cNvPr id="2076576783" name="Notes Placeholder 2"/>
           <p:cNvSpPr>
             <a:spLocks noGrp="1"/>
           </p:cNvSpPr>
@@ -635,7 +637,7 @@
       </p:sp>
       <p:sp>
         <p:nvSpPr>
-          <p:cNvPr id="4" name="Slide Number Placeholder 3"/>
+          <p:cNvPr id="886493572" name="Slide Number Placeholder 3"/>
           <p:cNvSpPr>
             <a:spLocks noGrp="1"/>
           </p:cNvSpPr>
@@ -686,7 +688,7 @@
       </p:grpSpPr>
       <p:sp>
         <p:nvSpPr>
-          <p:cNvPr id="2" name="Slide Image Placeholder 1"/>
+          <p:cNvPr id="1979002996" name="Slide Image Placeholder 1"/>
           <p:cNvSpPr>
             <a:spLocks noChangeAspect="1" noGrp="1" noRot="1"/>
           </p:cNvSpPr>
@@ -698,7 +700,7 @@
       </p:sp>
       <p:sp>
         <p:nvSpPr>
-          <p:cNvPr id="3" name="Notes Placeholder 2"/>
+          <p:cNvPr id="817542388" name="Notes Placeholder 2"/>
           <p:cNvSpPr>
             <a:spLocks noGrp="1"/>
           </p:cNvSpPr>
@@ -720,7 +722,7 @@
       </p:sp>
       <p:sp>
         <p:nvSpPr>
-          <p:cNvPr id="4" name="Slide Number Placeholder 3"/>
+          <p:cNvPr id="1657534317" name="Slide Number Placeholder 3"/>
           <p:cNvSpPr>
             <a:spLocks noGrp="1"/>
           </p:cNvSpPr>
@@ -771,7 +773,7 @@
       </p:grpSpPr>
       <p:sp>
         <p:nvSpPr>
-          <p:cNvPr id="2" name="Slide Image Placeholder 1"/>
+          <p:cNvPr id="1714831993" name="Slide Image Placeholder 1"/>
           <p:cNvSpPr>
             <a:spLocks noChangeAspect="1" noGrp="1" noRot="1"/>
           </p:cNvSpPr>
@@ -783,7 +785,7 @@
       </p:sp>
       <p:sp>
         <p:nvSpPr>
-          <p:cNvPr id="3" name="Notes Placeholder 2"/>
+          <p:cNvPr id="532092888" name="Notes Placeholder 2"/>
           <p:cNvSpPr>
             <a:spLocks noGrp="1"/>
           </p:cNvSpPr>
@@ -805,7 +807,7 @@
       </p:sp>
       <p:sp>
         <p:nvSpPr>
-          <p:cNvPr id="4" name="Slide Number Placeholder 3"/>
+          <p:cNvPr id="859868910" name="Slide Number Placeholder 3"/>
           <p:cNvSpPr>
             <a:spLocks noGrp="1"/>
           </p:cNvSpPr>
@@ -856,7 +858,7 @@
       </p:grpSpPr>
       <p:sp>
         <p:nvSpPr>
-          <p:cNvPr id="2" name="Slide Image Placeholder 1"/>
+          <p:cNvPr id="837585685" name="Slide Image Placeholder 1"/>
           <p:cNvSpPr>
             <a:spLocks noChangeAspect="1" noGrp="1" noRot="1"/>
           </p:cNvSpPr>
@@ -868,7 +870,7 @@
       </p:sp>
       <p:sp>
         <p:nvSpPr>
-          <p:cNvPr id="3" name="Notes Placeholder 2"/>
+          <p:cNvPr id="1853601437" name="Notes Placeholder 2"/>
           <p:cNvSpPr>
             <a:spLocks noGrp="1"/>
           </p:cNvSpPr>
@@ -890,7 +892,7 @@
       </p:sp>
       <p:sp>
         <p:nvSpPr>
-          <p:cNvPr id="4" name="Slide Number Placeholder 3"/>
+          <p:cNvPr id="2095272689" name="Slide Number Placeholder 3"/>
           <p:cNvSpPr>
             <a:spLocks noGrp="1"/>
           </p:cNvSpPr>
@@ -941,6 +943,91 @@
       </p:grpSpPr>
       <p:sp>
         <p:nvSpPr>
+          <p:cNvPr id="1277830066" name="Slide Image Placeholder 1"/>
+          <p:cNvSpPr>
+            <a:spLocks noChangeAspect="1" noGrp="1" noRot="1"/>
+          </p:cNvSpPr>
+          <p:nvPr>
+            <p:ph type="sldImg"/>
+          </p:nvPr>
+        </p:nvSpPr>
+        <p:spPr bwMode="auto"/>
+      </p:sp>
+      <p:sp>
+        <p:nvSpPr>
+          <p:cNvPr id="1699335459" name="Notes Placeholder 2"/>
+          <p:cNvSpPr>
+            <a:spLocks noGrp="1"/>
+          </p:cNvSpPr>
+          <p:nvPr>
+            <p:ph type="body" idx="1"/>
+          </p:nvPr>
+        </p:nvSpPr>
+        <p:spPr bwMode="auto"/>
+        <p:txBody>
+          <a:bodyPr/>
+          <a:lstStyle/>
+          <a:p>
+            <a:pPr>
+              <a:defRPr/>
+            </a:pPr>
+            <a:endParaRPr/>
+          </a:p>
+        </p:txBody>
+      </p:sp>
+      <p:sp>
+        <p:nvSpPr>
+          <p:cNvPr id="1556074440" name="Slide Number Placeholder 3"/>
+          <p:cNvSpPr>
+            <a:spLocks noGrp="1"/>
+          </p:cNvSpPr>
+          <p:nvPr>
+            <p:ph type="sldNum" sz="quarter" idx="10"/>
+          </p:nvPr>
+        </p:nvSpPr>
+        <p:spPr bwMode="auto"/>
+        <p:txBody>
+          <a:bodyPr/>
+          <a:lstStyle/>
+          <a:p>
+            <a:pPr>
+              <a:defRPr/>
+            </a:pPr>
+            <a:fld id="{B7DBCDE7-6F36-C8A0-551A-10A1D37A0822}" type="slidenum">
+              <a:rPr/>
+              <a:t/>
+            </a:fld>
+            <a:endParaRPr/>
+          </a:p>
+        </p:txBody>
+      </p:sp>
+    </p:spTree>
+  </p:cSld>
+  <p:clrMapOvr>
+    <a:masterClrMapping/>
+  </p:clrMapOvr>
+</p:notes>
+</file>
+
+<file path=ppt/notesSlides/notesSlide7.xml><?xml version="1.0" encoding="utf-8"?>
+<p:notes xmlns:a="http://schemas.openxmlformats.org/drawingml/2006/main" xmlns:r="http://schemas.openxmlformats.org/officeDocument/2006/relationships" xmlns:p="http://schemas.openxmlformats.org/presentationml/2006/main" xmlns:m="http://schemas.openxmlformats.org/officeDocument/2006/math" xmlns:w="http://schemas.openxmlformats.org/wordprocessingml/2006/main">
+  <p:cSld name="">
+    <p:spTree>
+      <p:nvGrpSpPr>
+        <p:cNvPr id="1" name=""/>
+        <p:cNvGrpSpPr/>
+        <p:nvPr/>
+      </p:nvGrpSpPr>
+      <p:grpSpPr bwMode="auto">
+        <a:xfrm>
+          <a:off x="0" y="0"/>
+          <a:ext cx="0" cy="0"/>
+          <a:chOff x="0" y="0"/>
+          <a:chExt cx="0" cy="0"/>
+        </a:xfrm>
+      </p:grpSpPr>
+      <p:sp>
+        <p:nvSpPr>
           <p:cNvPr id="2" name="Slide Image Placeholder 1"/>
           <p:cNvSpPr>
             <a:spLocks noChangeAspect="1" noGrp="1" noRot="1"/>
@@ -991,7 +1078,92 @@
             <a:pPr>
               <a:defRPr/>
             </a:pPr>
-            <a:fld id="{B7DBCDE7-6F36-C8A0-551A-10A1D37A0822}" type="slidenum">
+            <a:fld id="{A59772AA-7758-B939-6382-DA7062BD494F}" type="slidenum">
+              <a:rPr/>
+              <a:t/>
+            </a:fld>
+            <a:endParaRPr/>
+          </a:p>
+        </p:txBody>
+      </p:sp>
+    </p:spTree>
+  </p:cSld>
+  <p:clrMapOvr>
+    <a:masterClrMapping/>
+  </p:clrMapOvr>
+</p:notes>
+</file>
+
+<file path=ppt/notesSlides/notesSlide8.xml><?xml version="1.0" encoding="utf-8"?>
+<p:notes xmlns:a="http://schemas.openxmlformats.org/drawingml/2006/main" xmlns:r="http://schemas.openxmlformats.org/officeDocument/2006/relationships" xmlns:p="http://schemas.openxmlformats.org/presentationml/2006/main" xmlns:m="http://schemas.openxmlformats.org/officeDocument/2006/math" xmlns:w="http://schemas.openxmlformats.org/wordprocessingml/2006/main">
+  <p:cSld name="">
+    <p:spTree>
+      <p:nvGrpSpPr>
+        <p:cNvPr id="1" name=""/>
+        <p:cNvGrpSpPr/>
+        <p:nvPr/>
+      </p:nvGrpSpPr>
+      <p:grpSpPr bwMode="auto">
+        <a:xfrm>
+          <a:off x="0" y="0"/>
+          <a:ext cx="0" cy="0"/>
+          <a:chOff x="0" y="0"/>
+          <a:chExt cx="0" cy="0"/>
+        </a:xfrm>
+      </p:grpSpPr>
+      <p:sp>
+        <p:nvSpPr>
+          <p:cNvPr id="2" name="Slide Image Placeholder 1"/>
+          <p:cNvSpPr>
+            <a:spLocks noChangeAspect="1" noGrp="1" noRot="1"/>
+          </p:cNvSpPr>
+          <p:nvPr>
+            <p:ph type="sldImg"/>
+          </p:nvPr>
+        </p:nvSpPr>
+        <p:spPr bwMode="auto"/>
+      </p:sp>
+      <p:sp>
+        <p:nvSpPr>
+          <p:cNvPr id="3" name="Notes Placeholder 2"/>
+          <p:cNvSpPr>
+            <a:spLocks noGrp="1"/>
+          </p:cNvSpPr>
+          <p:nvPr>
+            <p:ph type="body" idx="1"/>
+          </p:nvPr>
+        </p:nvSpPr>
+        <p:spPr bwMode="auto"/>
+        <p:txBody>
+          <a:bodyPr/>
+          <a:lstStyle/>
+          <a:p>
+            <a:pPr>
+              <a:defRPr/>
+            </a:pPr>
+            <a:endParaRPr/>
+          </a:p>
+        </p:txBody>
+      </p:sp>
+      <p:sp>
+        <p:nvSpPr>
+          <p:cNvPr id="4" name="Slide Number Placeholder 3"/>
+          <p:cNvSpPr>
+            <a:spLocks noGrp="1"/>
+          </p:cNvSpPr>
+          <p:nvPr>
+            <p:ph type="sldNum" sz="quarter" idx="10"/>
+          </p:nvPr>
+        </p:nvSpPr>
+        <p:spPr bwMode="auto"/>
+        <p:txBody>
+          <a:bodyPr/>
+          <a:lstStyle/>
+          <a:p>
+            <a:pPr>
+              <a:defRPr/>
+            </a:pPr>
+            <a:fld id="{3E5A4836-3864-5CAB-2B90-53A48CE7C280}" type="slidenum">
               <a:rPr/>
               <a:t/>
             </a:fld>
@@ -1026,7 +1198,7 @@
       </p:grpSpPr>
       <p:sp>
         <p:nvSpPr>
-          <p:cNvPr id="35390660" name="Title 1"/>
+          <p:cNvPr id="558409585" name="Title 1"/>
           <p:cNvSpPr>
             <a:spLocks noGrp="1"/>
           </p:cNvSpPr>
@@ -1061,7 +1233,7 @@
       </p:sp>
       <p:sp>
         <p:nvSpPr>
-          <p:cNvPr id="1539361280" name="Subtitle 2"/>
+          <p:cNvPr id="1529382697" name="Subtitle 2"/>
           <p:cNvSpPr>
             <a:spLocks noGrp="1"/>
           </p:cNvSpPr>
@@ -1129,7 +1301,7 @@
       </p:sp>
       <p:sp>
         <p:nvSpPr>
-          <p:cNvPr id="2074674252" name="Date Placeholder 3"/>
+          <p:cNvPr id="1953890455" name="Date Placeholder 3"/>
           <p:cNvSpPr>
             <a:spLocks noGrp="1"/>
           </p:cNvSpPr>
@@ -1155,7 +1327,7 @@
       </p:sp>
       <p:sp>
         <p:nvSpPr>
-          <p:cNvPr id="1036854899" name="Footer Placeholder 4"/>
+          <p:cNvPr id="1275472792" name="Footer Placeholder 4"/>
           <p:cNvSpPr>
             <a:spLocks noGrp="1"/>
           </p:cNvSpPr>
@@ -1177,7 +1349,7 @@
       </p:sp>
       <p:sp>
         <p:nvSpPr>
-          <p:cNvPr id="1041929560" name="Slide Number Placeholder 5"/>
+          <p:cNvPr id="26427118" name="Slide Number Placeholder 5"/>
           <p:cNvSpPr>
             <a:spLocks noGrp="1"/>
           </p:cNvSpPr>
@@ -1228,7 +1400,7 @@
       </p:grpSpPr>
       <p:sp>
         <p:nvSpPr>
-          <p:cNvPr id="1547694745" name="Title 1"/>
+          <p:cNvPr id="254812061" name="Title 1"/>
           <p:cNvSpPr>
             <a:spLocks noGrp="1"/>
           </p:cNvSpPr>
@@ -1254,7 +1426,7 @@
       </p:sp>
       <p:sp>
         <p:nvSpPr>
-          <p:cNvPr id="1193457296" name="Vertical Text Placeholder 2"/>
+          <p:cNvPr id="2114807919" name="Vertical Text Placeholder 2"/>
           <p:cNvSpPr>
             <a:spLocks noGrp="1"/>
           </p:cNvSpPr>
@@ -1320,7 +1492,7 @@
       </p:sp>
       <p:sp>
         <p:nvSpPr>
-          <p:cNvPr id="723924524" name="Date Placeholder 3"/>
+          <p:cNvPr id="505453322" name="Date Placeholder 3"/>
           <p:cNvSpPr>
             <a:spLocks noGrp="1"/>
           </p:cNvSpPr>
@@ -1346,7 +1518,7 @@
       </p:sp>
       <p:sp>
         <p:nvSpPr>
-          <p:cNvPr id="453313815" name="Footer Placeholder 4"/>
+          <p:cNvPr id="1189246255" name="Footer Placeholder 4"/>
           <p:cNvSpPr>
             <a:spLocks noGrp="1"/>
           </p:cNvSpPr>
@@ -1368,7 +1540,7 @@
       </p:sp>
       <p:sp>
         <p:nvSpPr>
-          <p:cNvPr id="178914536" name="Slide Number Placeholder 5"/>
+          <p:cNvPr id="887490409" name="Slide Number Placeholder 5"/>
           <p:cNvSpPr>
             <a:spLocks noGrp="1"/>
           </p:cNvSpPr>
@@ -1419,7 +1591,7 @@
       </p:grpSpPr>
       <p:sp>
         <p:nvSpPr>
-          <p:cNvPr id="829728381" name="Vertical Title 1"/>
+          <p:cNvPr id="608320401" name="Vertical Title 1"/>
           <p:cNvSpPr>
             <a:spLocks noGrp="1"/>
           </p:cNvSpPr>
@@ -1450,7 +1622,7 @@
       </p:sp>
       <p:sp>
         <p:nvSpPr>
-          <p:cNvPr id="622423180" name="Vertical Text Placeholder 2"/>
+          <p:cNvPr id="1863873342" name="Vertical Text Placeholder 2"/>
           <p:cNvSpPr>
             <a:spLocks noGrp="1"/>
           </p:cNvSpPr>
@@ -1521,7 +1693,7 @@
       </p:sp>
       <p:sp>
         <p:nvSpPr>
-          <p:cNvPr id="1836560059" name="Date Placeholder 3"/>
+          <p:cNvPr id="1846190721" name="Date Placeholder 3"/>
           <p:cNvSpPr>
             <a:spLocks noGrp="1"/>
           </p:cNvSpPr>
@@ -1547,7 +1719,7 @@
       </p:sp>
       <p:sp>
         <p:nvSpPr>
-          <p:cNvPr id="1624545843" name="Footer Placeholder 4"/>
+          <p:cNvPr id="1200537384" name="Footer Placeholder 4"/>
           <p:cNvSpPr>
             <a:spLocks noGrp="1"/>
           </p:cNvSpPr>
@@ -1569,7 +1741,7 @@
       </p:sp>
       <p:sp>
         <p:nvSpPr>
-          <p:cNvPr id="650567518" name="Slide Number Placeholder 5"/>
+          <p:cNvPr id="1624701140" name="Slide Number Placeholder 5"/>
           <p:cNvSpPr>
             <a:spLocks noGrp="1"/>
           </p:cNvSpPr>
@@ -1620,7 +1792,7 @@
       </p:grpSpPr>
       <p:sp>
         <p:nvSpPr>
-          <p:cNvPr id="1235732318" name="Title 1"/>
+          <p:cNvPr id="1600799733" name="Title 1"/>
           <p:cNvSpPr>
             <a:spLocks noGrp="1"/>
           </p:cNvSpPr>
@@ -1646,7 +1818,7 @@
       </p:sp>
       <p:sp>
         <p:nvSpPr>
-          <p:cNvPr id="285050138" name="Content Placeholder 2"/>
+          <p:cNvPr id="1220871541" name="Content Placeholder 2"/>
           <p:cNvSpPr>
             <a:spLocks noGrp="1"/>
           </p:cNvSpPr>
@@ -1712,7 +1884,7 @@
       </p:sp>
       <p:sp>
         <p:nvSpPr>
-          <p:cNvPr id="1774390844" name="Date Placeholder 3"/>
+          <p:cNvPr id="1290842895" name="Date Placeholder 3"/>
           <p:cNvSpPr>
             <a:spLocks noGrp="1"/>
           </p:cNvSpPr>
@@ -1738,7 +1910,7 @@
       </p:sp>
       <p:sp>
         <p:nvSpPr>
-          <p:cNvPr id="2138121465" name="Footer Placeholder 4"/>
+          <p:cNvPr id="1572284496" name="Footer Placeholder 4"/>
           <p:cNvSpPr>
             <a:spLocks noGrp="1"/>
           </p:cNvSpPr>
@@ -1760,7 +1932,7 @@
       </p:sp>
       <p:sp>
         <p:nvSpPr>
-          <p:cNvPr id="629884240" name="Slide Number Placeholder 5"/>
+          <p:cNvPr id="1858959892" name="Slide Number Placeholder 5"/>
           <p:cNvSpPr>
             <a:spLocks noGrp="1"/>
           </p:cNvSpPr>
@@ -1811,7 +1983,7 @@
       </p:grpSpPr>
       <p:sp>
         <p:nvSpPr>
-          <p:cNvPr id="1519074616" name="Title 1"/>
+          <p:cNvPr id="913744315" name="Title 1"/>
           <p:cNvSpPr>
             <a:spLocks noGrp="1"/>
           </p:cNvSpPr>
@@ -1846,7 +2018,7 @@
       </p:sp>
       <p:sp>
         <p:nvSpPr>
-          <p:cNvPr id="1770462142" name="Text Placeholder 2"/>
+          <p:cNvPr id="1702787755" name="Text Placeholder 2"/>
           <p:cNvSpPr>
             <a:spLocks noGrp="1"/>
           </p:cNvSpPr>
@@ -1968,7 +2140,7 @@
       </p:sp>
       <p:sp>
         <p:nvSpPr>
-          <p:cNvPr id="381529021" name="Date Placeholder 3"/>
+          <p:cNvPr id="1686342051" name="Date Placeholder 3"/>
           <p:cNvSpPr>
             <a:spLocks noGrp="1"/>
           </p:cNvSpPr>
@@ -1994,7 +2166,7 @@
       </p:sp>
       <p:sp>
         <p:nvSpPr>
-          <p:cNvPr id="925496529" name="Footer Placeholder 4"/>
+          <p:cNvPr id="1908993736" name="Footer Placeholder 4"/>
           <p:cNvSpPr>
             <a:spLocks noGrp="1"/>
           </p:cNvSpPr>
@@ -2016,7 +2188,7 @@
       </p:sp>
       <p:sp>
         <p:nvSpPr>
-          <p:cNvPr id="1809799563" name="Slide Number Placeholder 5"/>
+          <p:cNvPr id="893081155" name="Slide Number Placeholder 5"/>
           <p:cNvSpPr>
             <a:spLocks noGrp="1"/>
           </p:cNvSpPr>
@@ -2067,7 +2239,7 @@
       </p:grpSpPr>
       <p:sp>
         <p:nvSpPr>
-          <p:cNvPr id="1844122118" name="Title 1"/>
+          <p:cNvPr id="2045052583" name="Title 1"/>
           <p:cNvSpPr>
             <a:spLocks noGrp="1"/>
           </p:cNvSpPr>
@@ -2093,7 +2265,7 @@
       </p:sp>
       <p:sp>
         <p:nvSpPr>
-          <p:cNvPr id="236273575" name="Content Placeholder 2"/>
+          <p:cNvPr id="1361669065" name="Content Placeholder 2"/>
           <p:cNvSpPr>
             <a:spLocks noGrp="1"/>
           </p:cNvSpPr>
@@ -2164,7 +2336,7 @@
       </p:sp>
       <p:sp>
         <p:nvSpPr>
-          <p:cNvPr id="1093803257" name="Content Placeholder 3"/>
+          <p:cNvPr id="1445150084" name="Content Placeholder 3"/>
           <p:cNvSpPr>
             <a:spLocks noGrp="1"/>
           </p:cNvSpPr>
@@ -2235,7 +2407,7 @@
       </p:sp>
       <p:sp>
         <p:nvSpPr>
-          <p:cNvPr id="273015861" name="Date Placeholder 4"/>
+          <p:cNvPr id="1950748639" name="Date Placeholder 4"/>
           <p:cNvSpPr>
             <a:spLocks noGrp="1"/>
           </p:cNvSpPr>
@@ -2261,7 +2433,7 @@
       </p:sp>
       <p:sp>
         <p:nvSpPr>
-          <p:cNvPr id="1202476112" name="Footer Placeholder 5"/>
+          <p:cNvPr id="417213057" name="Footer Placeholder 5"/>
           <p:cNvSpPr>
             <a:spLocks noGrp="1"/>
           </p:cNvSpPr>
@@ -2283,7 +2455,7 @@
       </p:sp>
       <p:sp>
         <p:nvSpPr>
-          <p:cNvPr id="1940047683" name="Slide Number Placeholder 6"/>
+          <p:cNvPr id="2033604653" name="Slide Number Placeholder 6"/>
           <p:cNvSpPr>
             <a:spLocks noGrp="1"/>
           </p:cNvSpPr>
@@ -2334,7 +2506,7 @@
       </p:grpSpPr>
       <p:sp>
         <p:nvSpPr>
-          <p:cNvPr id="883067906" name="Title 1"/>
+          <p:cNvPr id="1969718640" name="Title 1"/>
           <p:cNvSpPr>
             <a:spLocks noGrp="1"/>
           </p:cNvSpPr>
@@ -2365,7 +2537,7 @@
       </p:sp>
       <p:sp>
         <p:nvSpPr>
-          <p:cNvPr id="1064909659" name="Text Placeholder 2"/>
+          <p:cNvPr id="958009176" name="Text Placeholder 2"/>
           <p:cNvSpPr>
             <a:spLocks noGrp="1"/>
           </p:cNvSpPr>
@@ -2433,7 +2605,7 @@
       </p:sp>
       <p:sp>
         <p:nvSpPr>
-          <p:cNvPr id="1132401243" name="Content Placeholder 3"/>
+          <p:cNvPr id="729928588" name="Content Placeholder 3"/>
           <p:cNvSpPr>
             <a:spLocks noGrp="1"/>
           </p:cNvSpPr>
@@ -2504,7 +2676,7 @@
       </p:sp>
       <p:sp>
         <p:nvSpPr>
-          <p:cNvPr id="75907961" name="Text Placeholder 4"/>
+          <p:cNvPr id="1808464709" name="Text Placeholder 4"/>
           <p:cNvSpPr>
             <a:spLocks noGrp="1"/>
           </p:cNvSpPr>
@@ -2572,7 +2744,7 @@
       </p:sp>
       <p:sp>
         <p:nvSpPr>
-          <p:cNvPr id="2133126188" name="Content Placeholder 5"/>
+          <p:cNvPr id="239776535" name="Content Placeholder 5"/>
           <p:cNvSpPr>
             <a:spLocks noGrp="1"/>
           </p:cNvSpPr>
@@ -2643,7 +2815,7 @@
       </p:sp>
       <p:sp>
         <p:nvSpPr>
-          <p:cNvPr id="1631937177" name="Date Placeholder 6"/>
+          <p:cNvPr id="1612797488" name="Date Placeholder 6"/>
           <p:cNvSpPr>
             <a:spLocks noGrp="1"/>
           </p:cNvSpPr>
@@ -2669,7 +2841,7 @@
       </p:sp>
       <p:sp>
         <p:nvSpPr>
-          <p:cNvPr id="1067143124" name="Footer Placeholder 7"/>
+          <p:cNvPr id="1422979403" name="Footer Placeholder 7"/>
           <p:cNvSpPr>
             <a:spLocks noGrp="1"/>
           </p:cNvSpPr>
@@ -2691,7 +2863,7 @@
       </p:sp>
       <p:sp>
         <p:nvSpPr>
-          <p:cNvPr id="926167176" name="Slide Number Placeholder 8"/>
+          <p:cNvPr id="639449959" name="Slide Number Placeholder 8"/>
           <p:cNvSpPr>
             <a:spLocks noGrp="1"/>
           </p:cNvSpPr>
@@ -2742,7 +2914,7 @@
       </p:grpSpPr>
       <p:sp>
         <p:nvSpPr>
-          <p:cNvPr id="1191812297" name="Title 1"/>
+          <p:cNvPr id="408945676" name="Title 1"/>
           <p:cNvSpPr>
             <a:spLocks noGrp="1"/>
           </p:cNvSpPr>
@@ -2768,7 +2940,7 @@
       </p:sp>
       <p:sp>
         <p:nvSpPr>
-          <p:cNvPr id="926367254" name="Date Placeholder 2"/>
+          <p:cNvPr id="1283654266" name="Date Placeholder 2"/>
           <p:cNvSpPr>
             <a:spLocks noGrp="1"/>
           </p:cNvSpPr>
@@ -2794,7 +2966,7 @@
       </p:sp>
       <p:sp>
         <p:nvSpPr>
-          <p:cNvPr id="1043375627" name="Footer Placeholder 3"/>
+          <p:cNvPr id="203517314" name="Footer Placeholder 3"/>
           <p:cNvSpPr>
             <a:spLocks noGrp="1"/>
           </p:cNvSpPr>
@@ -2816,7 +2988,7 @@
       </p:sp>
       <p:sp>
         <p:nvSpPr>
-          <p:cNvPr id="192335514" name="Slide Number Placeholder 4"/>
+          <p:cNvPr id="1946118871" name="Slide Number Placeholder 4"/>
           <p:cNvSpPr>
             <a:spLocks noGrp="1"/>
           </p:cNvSpPr>
@@ -2867,7 +3039,7 @@
       </p:grpSpPr>
       <p:sp>
         <p:nvSpPr>
-          <p:cNvPr id="364190769" name="Date Placeholder 1"/>
+          <p:cNvPr id="378555425" name="Date Placeholder 1"/>
           <p:cNvSpPr>
             <a:spLocks noGrp="1"/>
           </p:cNvSpPr>
@@ -2893,7 +3065,7 @@
       </p:sp>
       <p:sp>
         <p:nvSpPr>
-          <p:cNvPr id="56434972" name="Footer Placeholder 2"/>
+          <p:cNvPr id="691077831" name="Footer Placeholder 2"/>
           <p:cNvSpPr>
             <a:spLocks noGrp="1"/>
           </p:cNvSpPr>
@@ -2915,7 +3087,7 @@
       </p:sp>
       <p:sp>
         <p:nvSpPr>
-          <p:cNvPr id="2034902203" name="Slide Number Placeholder 3"/>
+          <p:cNvPr id="1309600379" name="Slide Number Placeholder 3"/>
           <p:cNvSpPr>
             <a:spLocks noGrp="1"/>
           </p:cNvSpPr>
@@ -2966,7 +3138,7 @@
       </p:grpSpPr>
       <p:sp>
         <p:nvSpPr>
-          <p:cNvPr id="1320959974" name="Title 1"/>
+          <p:cNvPr id="1443704538" name="Title 1"/>
           <p:cNvSpPr>
             <a:spLocks noGrp="1"/>
           </p:cNvSpPr>
@@ -3001,7 +3173,7 @@
       </p:sp>
       <p:sp>
         <p:nvSpPr>
-          <p:cNvPr id="1501377746" name="Content Placeholder 2"/>
+          <p:cNvPr id="343164734" name="Content Placeholder 2"/>
           <p:cNvSpPr>
             <a:spLocks noGrp="1"/>
           </p:cNvSpPr>
@@ -3100,7 +3272,7 @@
       </p:sp>
       <p:sp>
         <p:nvSpPr>
-          <p:cNvPr id="527934986" name="Text Placeholder 3"/>
+          <p:cNvPr id="1013193439" name="Text Placeholder 3"/>
           <p:cNvSpPr>
             <a:spLocks noGrp="1"/>
           </p:cNvSpPr>
@@ -3168,7 +3340,7 @@
       </p:sp>
       <p:sp>
         <p:nvSpPr>
-          <p:cNvPr id="1246133720" name="Date Placeholder 4"/>
+          <p:cNvPr id="934197640" name="Date Placeholder 4"/>
           <p:cNvSpPr>
             <a:spLocks noGrp="1"/>
           </p:cNvSpPr>
@@ -3194,7 +3366,7 @@
       </p:sp>
       <p:sp>
         <p:nvSpPr>
-          <p:cNvPr id="940057408" name="Footer Placeholder 5"/>
+          <p:cNvPr id="738271813" name="Footer Placeholder 5"/>
           <p:cNvSpPr>
             <a:spLocks noGrp="1"/>
           </p:cNvSpPr>
@@ -3216,7 +3388,7 @@
       </p:sp>
       <p:sp>
         <p:nvSpPr>
-          <p:cNvPr id="1800829572" name="Slide Number Placeholder 6"/>
+          <p:cNvPr id="1706117802" name="Slide Number Placeholder 6"/>
           <p:cNvSpPr>
             <a:spLocks noGrp="1"/>
           </p:cNvSpPr>
@@ -3267,7 +3439,7 @@
       </p:grpSpPr>
       <p:sp>
         <p:nvSpPr>
-          <p:cNvPr id="1811151804" name="Title 1"/>
+          <p:cNvPr id="480094692" name="Title 1"/>
           <p:cNvSpPr>
             <a:spLocks noGrp="1"/>
           </p:cNvSpPr>
@@ -3302,7 +3474,7 @@
       </p:sp>
       <p:sp>
         <p:nvSpPr>
-          <p:cNvPr id="615240788" name="Picture Placeholder 2"/>
+          <p:cNvPr id="1357422944" name="Picture Placeholder 2"/>
           <p:cNvSpPr>
             <a:spLocks noChangeAspect="1" noGrp="1"/>
           </p:cNvSpPr>
@@ -3370,7 +3542,7 @@
       </p:sp>
       <p:sp>
         <p:nvSpPr>
-          <p:cNvPr id="718463812" name="Text Placeholder 3"/>
+          <p:cNvPr id="646094154" name="Text Placeholder 3"/>
           <p:cNvSpPr>
             <a:spLocks noGrp="1"/>
           </p:cNvSpPr>
@@ -3438,7 +3610,7 @@
       </p:sp>
       <p:sp>
         <p:nvSpPr>
-          <p:cNvPr id="1377613796" name="Date Placeholder 4"/>
+          <p:cNvPr id="317845111" name="Date Placeholder 4"/>
           <p:cNvSpPr>
             <a:spLocks noGrp="1"/>
           </p:cNvSpPr>
@@ -3464,7 +3636,7 @@
       </p:sp>
       <p:sp>
         <p:nvSpPr>
-          <p:cNvPr id="902549826" name="Footer Placeholder 5"/>
+          <p:cNvPr id="1047661258" name="Footer Placeholder 5"/>
           <p:cNvSpPr>
             <a:spLocks noGrp="1"/>
           </p:cNvSpPr>
@@ -3486,7 +3658,7 @@
       </p:sp>
       <p:sp>
         <p:nvSpPr>
-          <p:cNvPr id="266054656" name="Slide Number Placeholder 6"/>
+          <p:cNvPr id="507435336" name="Slide Number Placeholder 6"/>
           <p:cNvSpPr>
             <a:spLocks noGrp="1"/>
           </p:cNvSpPr>
@@ -3542,7 +3714,7 @@
       </p:grpSpPr>
       <p:sp>
         <p:nvSpPr>
-          <p:cNvPr id="12337170" name="Title Placeholder 1"/>
+          <p:cNvPr id="132925618" name="Title Placeholder 1"/>
           <p:cNvSpPr>
             <a:spLocks noGrp="1"/>
           </p:cNvSpPr>
@@ -3578,7 +3750,7 @@
       </p:sp>
       <p:sp>
         <p:nvSpPr>
-          <p:cNvPr id="835540252" name="Text Placeholder 2"/>
+          <p:cNvPr id="1104282361" name="Text Placeholder 2"/>
           <p:cNvSpPr>
             <a:spLocks noGrp="1"/>
           </p:cNvSpPr>
@@ -3654,7 +3826,7 @@
       </p:sp>
       <p:sp>
         <p:nvSpPr>
-          <p:cNvPr id="939439269" name="Date Placeholder 3"/>
+          <p:cNvPr id="805789657" name="Date Placeholder 3"/>
           <p:cNvSpPr>
             <a:spLocks noGrp="1"/>
           </p:cNvSpPr>
@@ -3698,7 +3870,7 @@
       </p:sp>
       <p:sp>
         <p:nvSpPr>
-          <p:cNvPr id="16737543" name="Footer Placeholder 4"/>
+          <p:cNvPr id="513512525" name="Footer Placeholder 4"/>
           <p:cNvSpPr>
             <a:spLocks noGrp="1"/>
           </p:cNvSpPr>
@@ -3738,7 +3910,7 @@
       </p:sp>
       <p:sp>
         <p:nvSpPr>
-          <p:cNvPr id="1336378410" name="Slide Number Placeholder 5"/>
+          <p:cNvPr id="264462621" name="Slide Number Placeholder 5"/>
           <p:cNvSpPr>
             <a:spLocks noGrp="1"/>
           </p:cNvSpPr>
@@ -4098,7 +4270,7 @@
       </p:grpSpPr>
       <p:sp>
         <p:nvSpPr>
-          <p:cNvPr id="5597907" name=""/>
+          <p:cNvPr id="2009912348" name=""/>
           <p:cNvSpPr txBox="1"/>
           <p:nvPr/>
         </p:nvSpPr>
@@ -4130,7 +4302,7 @@
       </p:sp>
       <p:pic>
         <p:nvPicPr>
-          <p:cNvPr id="574271275" name=""/>
+          <p:cNvPr id="543406731" name=""/>
           <p:cNvPicPr>
             <a:picLocks noChangeAspect="1"/>
           </p:cNvPicPr>
@@ -4152,7 +4324,7 @@
       </p:pic>
       <p:pic>
         <p:nvPicPr>
-          <p:cNvPr id="1842089631" name=""/>
+          <p:cNvPr id="323828526" name=""/>
           <p:cNvPicPr>
             <a:picLocks noChangeAspect="1"/>
           </p:cNvPicPr>
@@ -4174,7 +4346,7 @@
       </p:pic>
       <p:sp>
         <p:nvSpPr>
-          <p:cNvPr id="1876915102" name=""/>
+          <p:cNvPr id="667690164" name=""/>
           <p:cNvSpPr txBox="1"/>
           <p:nvPr/>
         </p:nvSpPr>
@@ -4206,7 +4378,7 @@
       </p:sp>
       <p:sp>
         <p:nvSpPr>
-          <p:cNvPr id="885995595" name=""/>
+          <p:cNvPr id="161783267" name=""/>
           <p:cNvSpPr txBox="1"/>
           <p:nvPr/>
         </p:nvSpPr>
@@ -4382,7 +4554,7 @@
       </p:grpSpPr>
       <p:sp>
         <p:nvSpPr>
-          <p:cNvPr id="912437995" name=""/>
+          <p:cNvPr id="1215134523" name=""/>
           <p:cNvSpPr txBox="1"/>
           <p:nvPr/>
         </p:nvSpPr>
@@ -4414,7 +4586,7 @@
       </p:sp>
       <p:sp>
         <p:nvSpPr>
-          <p:cNvPr id="1937347014" name=""/>
+          <p:cNvPr id="906363960" name=""/>
           <p:cNvSpPr txBox="1"/>
           <p:nvPr/>
         </p:nvSpPr>
@@ -4501,7 +4673,7 @@
       </p:sp>
       <p:sp>
         <p:nvSpPr>
-          <p:cNvPr id="425844862" name=""/>
+          <p:cNvPr id="612198847" name=""/>
           <p:cNvSpPr txBox="1"/>
           <p:nvPr/>
         </p:nvSpPr>
@@ -4570,7 +4742,7 @@
       </p:grpSpPr>
       <p:sp>
         <p:nvSpPr>
-          <p:cNvPr id="1220550118" name=""/>
+          <p:cNvPr id="2113163632" name=""/>
           <p:cNvSpPr txBox="1"/>
           <p:nvPr/>
         </p:nvSpPr>
@@ -4602,7 +4774,7 @@
       </p:sp>
       <p:sp>
         <p:nvSpPr>
-          <p:cNvPr id="943700752" name=""/>
+          <p:cNvPr id="1634746169" name=""/>
           <p:cNvSpPr txBox="1"/>
           <p:nvPr/>
         </p:nvSpPr>
@@ -4644,7 +4816,7 @@
       </p:sp>
       <p:pic>
         <p:nvPicPr>
-          <p:cNvPr id="442826224" name=""/>
+          <p:cNvPr id="725926493" name=""/>
           <p:cNvPicPr>
             <a:picLocks noChangeAspect="1"/>
           </p:cNvPicPr>
@@ -4666,7 +4838,7 @@
       </p:pic>
       <p:sp>
         <p:nvSpPr>
-          <p:cNvPr id="1083852741" name=""/>
+          <p:cNvPr id="1965814510" name=""/>
           <p:cNvSpPr txBox="1"/>
           <p:nvPr/>
         </p:nvSpPr>
@@ -4698,7 +4870,7 @@
       </p:sp>
       <p:sp>
         <p:nvSpPr>
-          <p:cNvPr id="1929231310" name=""/>
+          <p:cNvPr id="1924794079" name=""/>
           <p:cNvSpPr txBox="1"/>
           <p:nvPr/>
         </p:nvSpPr>
@@ -4730,7 +4902,7 @@
       </p:sp>
       <p:pic>
         <p:nvPicPr>
-          <p:cNvPr id="1716921281" name=""/>
+          <p:cNvPr id="2072989438" name=""/>
           <p:cNvPicPr>
             <a:picLocks noChangeAspect="1"/>
           </p:cNvPicPr>
@@ -4752,7 +4924,7 @@
       </p:pic>
       <p:pic>
         <p:nvPicPr>
-          <p:cNvPr id="1074528164" name=""/>
+          <p:cNvPr id="1038951188" name=""/>
           <p:cNvPicPr>
             <a:picLocks noChangeAspect="1"/>
           </p:cNvPicPr>
@@ -4807,7 +4979,7 @@
       </p:grpSpPr>
       <p:pic>
         <p:nvPicPr>
-          <p:cNvPr id="942422961" name=""/>
+          <p:cNvPr id="1226818234" name=""/>
           <p:cNvPicPr>
             <a:picLocks noChangeAspect="1"/>
           </p:cNvPicPr>
@@ -4829,7 +5001,7 @@
       </p:pic>
       <p:sp>
         <p:nvSpPr>
-          <p:cNvPr id="1286138917" name=""/>
+          <p:cNvPr id="1384773452" name=""/>
           <p:cNvSpPr txBox="1"/>
           <p:nvPr/>
         </p:nvSpPr>
@@ -4894,7 +5066,7 @@
       </p:grpSpPr>
       <p:pic>
         <p:nvPicPr>
-          <p:cNvPr id="1859082122" name=""/>
+          <p:cNvPr id="586338080" name=""/>
           <p:cNvPicPr>
             <a:picLocks noChangeAspect="1"/>
           </p:cNvPicPr>
@@ -4916,7 +5088,7 @@
       </p:pic>
       <p:sp>
         <p:nvSpPr>
-          <p:cNvPr id="1954692272" name=""/>
+          <p:cNvPr id="1322372450" name=""/>
           <p:cNvSpPr txBox="1"/>
           <p:nvPr/>
         </p:nvSpPr>
@@ -4944,7 +5116,7 @@
       </p:sp>
       <p:sp>
         <p:nvSpPr>
-          <p:cNvPr id="322263528" name=""/>
+          <p:cNvPr id="1688762186" name=""/>
           <p:cNvSpPr txBox="1"/>
           <p:nvPr/>
         </p:nvSpPr>
@@ -5009,7 +5181,7 @@
       </p:grpSpPr>
       <p:pic>
         <p:nvPicPr>
-          <p:cNvPr id="1180124005" name=""/>
+          <p:cNvPr id="1018964655" name=""/>
           <p:cNvPicPr>
             <a:picLocks noChangeAspect="1"/>
           </p:cNvPicPr>
@@ -5023,6 +5195,292 @@
           <a:xfrm>
             <a:off x="-167105" y="700087"/>
             <a:ext cx="12734924" cy="5457824"/>
+          </a:xfrm>
+          <a:prstGeom prst="rect">
+            <a:avLst/>
+          </a:prstGeom>
+        </p:spPr>
+      </p:pic>
+    </p:spTree>
+  </p:cSld>
+  <p:clrMapOvr>
+    <a:masterClrMapping/>
+  </p:clrMapOvr>
+  <mc:AlternateContent xmlns:mc="http://schemas.openxmlformats.org/markup-compatibility/2006">
+    <mc:Choice xmlns:p159="http://schemas.microsoft.com/office/powerpoint/2015/09/main" xmlns:p14="http://schemas.microsoft.com/office/powerpoint/2010/main" Requires="p159">
+      <p:transition p14:dur="2000" advClick="1"/>
+    </mc:Choice>
+    <mc:Fallback>
+      <p:transition advClick="1"/>
+    </mc:Fallback>
+  </mc:AlternateContent>
+</p:sld>
+</file>
+
+<file path=ppt/slides/slide7.xml><?xml version="1.0" encoding="utf-8"?>
+<p:sld xmlns:a="http://schemas.openxmlformats.org/drawingml/2006/main" xmlns:r="http://schemas.openxmlformats.org/officeDocument/2006/relationships" xmlns:p="http://schemas.openxmlformats.org/presentationml/2006/main" xmlns:m="http://schemas.openxmlformats.org/officeDocument/2006/math" xmlns:w="http://schemas.openxmlformats.org/wordprocessingml/2006/main" xmlns:mc="http://schemas.openxmlformats.org/markup-compatibility/2006" showMasterPhAnim="0" showMasterSp="1" show="1">
+  <p:cSld name="">
+    <p:spTree>
+      <p:nvGrpSpPr>
+        <p:cNvPr id="1" name=""/>
+        <p:cNvGrpSpPr/>
+        <p:nvPr/>
+      </p:nvGrpSpPr>
+      <p:grpSpPr bwMode="auto">
+        <a:xfrm>
+          <a:off x="0" y="0"/>
+          <a:ext cx="0" cy="0"/>
+          <a:chOff x="0" y="0"/>
+          <a:chExt cx="0" cy="0"/>
+        </a:xfrm>
+      </p:grpSpPr>
+      <p:pic>
+        <p:nvPicPr>
+          <p:cNvPr id="1774881176" name=""/>
+          <p:cNvPicPr>
+            <a:picLocks noChangeAspect="1"/>
+          </p:cNvPicPr>
+          <p:nvPr/>
+        </p:nvPicPr>
+        <p:blipFill rotWithShape="1">
+          <a:blip r:embed="rId3"/>
+          <a:stretch/>
+        </p:blipFill>
+        <p:spPr bwMode="auto">
+          <a:xfrm>
+            <a:off x="0" y="0"/>
+            <a:ext cx="2990849" cy="2952749"/>
+          </a:xfrm>
+          <a:prstGeom prst="rect">
+            <a:avLst/>
+          </a:prstGeom>
+        </p:spPr>
+      </p:pic>
+      <p:pic>
+        <p:nvPicPr>
+          <p:cNvPr id="2082136773" name=""/>
+          <p:cNvPicPr>
+            <a:picLocks noChangeAspect="1"/>
+          </p:cNvPicPr>
+          <p:nvPr/>
+        </p:nvPicPr>
+        <p:blipFill rotWithShape="1">
+          <a:blip r:embed="rId4"/>
+          <a:stretch/>
+        </p:blipFill>
+        <p:spPr bwMode="auto">
+          <a:xfrm>
+            <a:off x="3074402" y="0"/>
+            <a:ext cx="2990849" cy="2952749"/>
+          </a:xfrm>
+          <a:prstGeom prst="rect">
+            <a:avLst/>
+          </a:prstGeom>
+        </p:spPr>
+      </p:pic>
+      <p:pic>
+        <p:nvPicPr>
+          <p:cNvPr id="701227640" name=""/>
+          <p:cNvPicPr>
+            <a:picLocks noChangeAspect="1"/>
+          </p:cNvPicPr>
+          <p:nvPr/>
+        </p:nvPicPr>
+        <p:blipFill rotWithShape="1">
+          <a:blip r:embed="rId5"/>
+          <a:stretch/>
+        </p:blipFill>
+        <p:spPr bwMode="auto">
+          <a:xfrm>
+            <a:off x="6148805" y="0"/>
+            <a:ext cx="2990849" cy="2952749"/>
+          </a:xfrm>
+          <a:prstGeom prst="rect">
+            <a:avLst/>
+          </a:prstGeom>
+        </p:spPr>
+      </p:pic>
+      <p:pic>
+        <p:nvPicPr>
+          <p:cNvPr id="1073411540" name=""/>
+          <p:cNvPicPr>
+            <a:picLocks noChangeAspect="1"/>
+          </p:cNvPicPr>
+          <p:nvPr/>
+        </p:nvPicPr>
+        <p:blipFill rotWithShape="1">
+          <a:blip r:embed="rId6"/>
+          <a:stretch/>
+        </p:blipFill>
+        <p:spPr bwMode="auto">
+          <a:xfrm>
+            <a:off x="9139655" y="0"/>
+            <a:ext cx="2990849" cy="2952749"/>
+          </a:xfrm>
+          <a:prstGeom prst="rect">
+            <a:avLst/>
+          </a:prstGeom>
+        </p:spPr>
+      </p:pic>
+      <p:pic>
+        <p:nvPicPr>
+          <p:cNvPr id="1208187068" name=""/>
+          <p:cNvPicPr>
+            <a:picLocks noChangeAspect="1"/>
+          </p:cNvPicPr>
+          <p:nvPr/>
+        </p:nvPicPr>
+        <p:blipFill rotWithShape="1">
+          <a:blip r:embed="rId7"/>
+          <a:stretch/>
+        </p:blipFill>
+        <p:spPr bwMode="auto">
+          <a:xfrm flipH="0" flipV="0">
+            <a:off x="0" y="3007894"/>
+            <a:ext cx="2990849" cy="3543272"/>
+          </a:xfrm>
+          <a:prstGeom prst="rect">
+            <a:avLst/>
+          </a:prstGeom>
+        </p:spPr>
+      </p:pic>
+    </p:spTree>
+  </p:cSld>
+  <p:clrMapOvr>
+    <a:masterClrMapping/>
+  </p:clrMapOvr>
+  <mc:AlternateContent xmlns:mc="http://schemas.openxmlformats.org/markup-compatibility/2006">
+    <mc:Choice xmlns:p159="http://schemas.microsoft.com/office/powerpoint/2015/09/main" xmlns:p14="http://schemas.microsoft.com/office/powerpoint/2010/main" Requires="p159">
+      <p:transition p14:dur="2000" advClick="1"/>
+    </mc:Choice>
+    <mc:Fallback>
+      <p:transition advClick="1"/>
+    </mc:Fallback>
+  </mc:AlternateContent>
+</p:sld>
+</file>
+
+<file path=ppt/slides/slide8.xml><?xml version="1.0" encoding="utf-8"?>
+<p:sld xmlns:a="http://schemas.openxmlformats.org/drawingml/2006/main" xmlns:r="http://schemas.openxmlformats.org/officeDocument/2006/relationships" xmlns:p="http://schemas.openxmlformats.org/presentationml/2006/main" xmlns:m="http://schemas.openxmlformats.org/officeDocument/2006/math" xmlns:w="http://schemas.openxmlformats.org/wordprocessingml/2006/main" xmlns:mc="http://schemas.openxmlformats.org/markup-compatibility/2006" showMasterPhAnim="0" showMasterSp="1" show="1">
+  <p:cSld name="">
+    <p:spTree>
+      <p:nvGrpSpPr>
+        <p:cNvPr id="1" name=""/>
+        <p:cNvGrpSpPr/>
+        <p:nvPr/>
+      </p:nvGrpSpPr>
+      <p:grpSpPr bwMode="auto">
+        <a:xfrm>
+          <a:off x="0" y="0"/>
+          <a:ext cx="0" cy="0"/>
+          <a:chOff x="0" y="0"/>
+          <a:chExt cx="0" cy="0"/>
+        </a:xfrm>
+      </p:grpSpPr>
+      <p:pic>
+        <p:nvPicPr>
+          <p:cNvPr id="894849749" name=""/>
+          <p:cNvPicPr>
+            <a:picLocks noChangeAspect="1"/>
+          </p:cNvPicPr>
+          <p:nvPr/>
+        </p:nvPicPr>
+        <p:blipFill rotWithShape="1">
+          <a:blip r:embed="rId3"/>
+          <a:stretch/>
+        </p:blipFill>
+        <p:spPr bwMode="auto">
+          <a:xfrm flipH="0" flipV="0">
+            <a:off x="-34779" y="3007893"/>
+            <a:ext cx="3060410" cy="3625681"/>
+          </a:xfrm>
+          <a:prstGeom prst="rect">
+            <a:avLst/>
+          </a:prstGeom>
+        </p:spPr>
+      </p:pic>
+      <p:pic>
+        <p:nvPicPr>
+          <p:cNvPr id="1253521754" name=""/>
+          <p:cNvPicPr>
+            <a:picLocks noChangeAspect="1"/>
+          </p:cNvPicPr>
+          <p:nvPr/>
+        </p:nvPicPr>
+        <p:blipFill rotWithShape="1">
+          <a:blip r:embed="rId4"/>
+          <a:stretch/>
+        </p:blipFill>
+        <p:spPr bwMode="auto">
+          <a:xfrm>
+            <a:off x="9140657" y="0"/>
+            <a:ext cx="2971800" cy="2952749"/>
+          </a:xfrm>
+          <a:prstGeom prst="rect">
+            <a:avLst/>
+          </a:prstGeom>
+        </p:spPr>
+      </p:pic>
+      <p:pic>
+        <p:nvPicPr>
+          <p:cNvPr id="892909461" name=""/>
+          <p:cNvPicPr>
+            <a:picLocks noChangeAspect="1"/>
+          </p:cNvPicPr>
+          <p:nvPr/>
+        </p:nvPicPr>
+        <p:blipFill rotWithShape="1">
+          <a:blip r:embed="rId5"/>
+          <a:stretch/>
+        </p:blipFill>
+        <p:spPr bwMode="auto">
+          <a:xfrm>
+            <a:off x="3040647" y="0"/>
+            <a:ext cx="2971800" cy="2952749"/>
+          </a:xfrm>
+          <a:prstGeom prst="rect">
+            <a:avLst/>
+          </a:prstGeom>
+        </p:spPr>
+      </p:pic>
+      <p:pic>
+        <p:nvPicPr>
+          <p:cNvPr id="187884009" name=""/>
+          <p:cNvPicPr>
+            <a:picLocks noChangeAspect="1"/>
+          </p:cNvPicPr>
+          <p:nvPr/>
+        </p:nvPicPr>
+        <p:blipFill rotWithShape="1">
+          <a:blip r:embed="rId6"/>
+          <a:stretch/>
+        </p:blipFill>
+        <p:spPr bwMode="auto">
+          <a:xfrm>
+            <a:off x="9525" y="0"/>
+            <a:ext cx="2971800" cy="2952749"/>
+          </a:xfrm>
+          <a:prstGeom prst="rect">
+            <a:avLst/>
+          </a:prstGeom>
+        </p:spPr>
+      </p:pic>
+      <p:pic>
+        <p:nvPicPr>
+          <p:cNvPr id="1734604978" name=""/>
+          <p:cNvPicPr>
+            <a:picLocks noChangeAspect="1"/>
+          </p:cNvPicPr>
+          <p:nvPr/>
+        </p:nvPicPr>
+        <p:blipFill rotWithShape="1">
+          <a:blip r:embed="rId7"/>
+          <a:stretch/>
+        </p:blipFill>
+        <p:spPr bwMode="auto">
+          <a:xfrm>
+            <a:off x="6079289" y="0"/>
+            <a:ext cx="2971800" cy="2952749"/>
           </a:xfrm>
           <a:prstGeom prst="rect">
             <a:avLst/>
